--- a/livro_ia_educacao/saida/pptx/Cap31_slides.pptx
+++ b/livro_ia_educacao/saida/pptx/Cap31_slides.pptx
@@ -6551,7 +6551,7 @@
                 <a:ea typeface="Cambria" pitchFamily="34" charset="-122"/>
                 <a:cs typeface="Cambria" pitchFamily="34" charset="-120"/>
               </a:rPr>
-              <a:t>Atividade: diagnóstico rápido em quatro passos</a:t>
+              <a:t>Atividade: diagnóstico rápido da escola</a:t>
             </a:r>
             <a:endParaRPr lang="en-US" sz="3400" dirty="0"/>
           </a:p>

--- a/livro_ia_educacao/saida/pptx/Cap31_slides.pptx
+++ b/livro_ia_educacao/saida/pptx/Cap31_slides.pptx
@@ -9594,11 +9594,11 @@
         <p:spPr>
           <a:xfrm>
             <a:off x="548640" y="1417320"/>
-            <a:ext cx="11064240" cy="762000"/>
+            <a:ext cx="11064240" cy="682752"/>
           </a:xfrm>
           <a:prstGeom prst="roundRect">
             <a:avLst>
-              <a:gd name="adj" fmla="val 14400"/>
+              <a:gd name="adj" fmla="val 16071"/>
             </a:avLst>
           </a:prstGeom>
           <a:solidFill>
@@ -9625,7 +9625,7 @@
         <p:spPr>
           <a:xfrm>
             <a:off x="731520" y="1417320"/>
-            <a:ext cx="548640" cy="762000"/>
+            <a:ext cx="548640" cy="682752"/>
           </a:xfrm>
           <a:prstGeom prst="rect">
             <a:avLst/>
@@ -9661,7 +9661,7 @@
         <p:spPr>
           <a:xfrm>
             <a:off x="1463040" y="1417320"/>
-            <a:ext cx="9966960" cy="762000"/>
+            <a:ext cx="9966960" cy="682752"/>
           </a:xfrm>
           <a:prstGeom prst="rect">
             <a:avLst/>
@@ -9696,12 +9696,12 @@
         </p:nvSpPr>
         <p:spPr>
           <a:xfrm>
-            <a:off x="548640" y="2289048"/>
-            <a:ext cx="11064240" cy="762000"/>
+            <a:off x="548640" y="2209800"/>
+            <a:ext cx="11064240" cy="682752"/>
           </a:xfrm>
           <a:prstGeom prst="roundRect">
             <a:avLst>
-              <a:gd name="adj" fmla="val 14400"/>
+              <a:gd name="adj" fmla="val 16071"/>
             </a:avLst>
           </a:prstGeom>
           <a:solidFill>
@@ -9727,8 +9727,8 @@
         </p:nvSpPr>
         <p:spPr>
           <a:xfrm>
-            <a:off x="731520" y="2289048"/>
-            <a:ext cx="548640" cy="762000"/>
+            <a:off x="731520" y="2209800"/>
+            <a:ext cx="548640" cy="682752"/>
           </a:xfrm>
           <a:prstGeom prst="rect">
             <a:avLst/>
@@ -9763,8 +9763,8 @@
         </p:nvSpPr>
         <p:spPr>
           <a:xfrm>
-            <a:off x="1463040" y="2289048"/>
-            <a:ext cx="9966960" cy="762000"/>
+            <a:off x="1463040" y="2209800"/>
+            <a:ext cx="9966960" cy="682752"/>
           </a:xfrm>
           <a:prstGeom prst="rect">
             <a:avLst/>
@@ -9799,12 +9799,12 @@
         </p:nvSpPr>
         <p:spPr>
           <a:xfrm>
-            <a:off x="548640" y="3160776"/>
-            <a:ext cx="11064240" cy="762000"/>
+            <a:off x="548640" y="3002280"/>
+            <a:ext cx="11064240" cy="682752"/>
           </a:xfrm>
           <a:prstGeom prst="roundRect">
             <a:avLst>
-              <a:gd name="adj" fmla="val 14400"/>
+              <a:gd name="adj" fmla="val 16071"/>
             </a:avLst>
           </a:prstGeom>
           <a:solidFill>
@@ -9830,8 +9830,8 @@
         </p:nvSpPr>
         <p:spPr>
           <a:xfrm>
-            <a:off x="731520" y="3160776"/>
-            <a:ext cx="548640" cy="762000"/>
+            <a:off x="731520" y="3002280"/>
+            <a:ext cx="548640" cy="682752"/>
           </a:xfrm>
           <a:prstGeom prst="rect">
             <a:avLst/>
@@ -9866,8 +9866,8 @@
         </p:nvSpPr>
         <p:spPr>
           <a:xfrm>
-            <a:off x="1463040" y="3160776"/>
-            <a:ext cx="9966960" cy="762000"/>
+            <a:off x="1463040" y="3002280"/>
+            <a:ext cx="9966960" cy="682752"/>
           </a:xfrm>
           <a:prstGeom prst="rect">
             <a:avLst/>
@@ -9902,12 +9902,12 @@
         </p:nvSpPr>
         <p:spPr>
           <a:xfrm>
-            <a:off x="548640" y="4032504"/>
-            <a:ext cx="11064240" cy="762000"/>
+            <a:off x="548640" y="3794760"/>
+            <a:ext cx="11064240" cy="682752"/>
           </a:xfrm>
           <a:prstGeom prst="roundRect">
             <a:avLst>
-              <a:gd name="adj" fmla="val 14400"/>
+              <a:gd name="adj" fmla="val 16071"/>
             </a:avLst>
           </a:prstGeom>
           <a:solidFill>
@@ -9933,8 +9933,8 @@
         </p:nvSpPr>
         <p:spPr>
           <a:xfrm>
-            <a:off x="731520" y="4032504"/>
-            <a:ext cx="548640" cy="762000"/>
+            <a:off x="731520" y="3794760"/>
+            <a:ext cx="548640" cy="682752"/>
           </a:xfrm>
           <a:prstGeom prst="rect">
             <a:avLst/>
@@ -9969,8 +9969,8 @@
         </p:nvSpPr>
         <p:spPr>
           <a:xfrm>
-            <a:off x="1463040" y="4032504"/>
-            <a:ext cx="9966960" cy="762000"/>
+            <a:off x="1463040" y="3794760"/>
+            <a:ext cx="9966960" cy="682752"/>
           </a:xfrm>
           <a:prstGeom prst="rect">
             <a:avLst/>
@@ -10005,12 +10005,12 @@
         </p:nvSpPr>
         <p:spPr>
           <a:xfrm>
-            <a:off x="548640" y="4904232"/>
-            <a:ext cx="11064240" cy="762000"/>
+            <a:off x="548640" y="4587240"/>
+            <a:ext cx="11064240" cy="682752"/>
           </a:xfrm>
           <a:prstGeom prst="roundRect">
             <a:avLst>
-              <a:gd name="adj" fmla="val 14400"/>
+              <a:gd name="adj" fmla="val 16071"/>
             </a:avLst>
           </a:prstGeom>
           <a:solidFill>
@@ -10036,8 +10036,8 @@
         </p:nvSpPr>
         <p:spPr>
           <a:xfrm>
-            <a:off x="731520" y="4904232"/>
-            <a:ext cx="548640" cy="762000"/>
+            <a:off x="731520" y="4587240"/>
+            <a:ext cx="548640" cy="682752"/>
           </a:xfrm>
           <a:prstGeom prst="rect">
             <a:avLst/>
@@ -10072,8 +10072,8 @@
         </p:nvSpPr>
         <p:spPr>
           <a:xfrm>
-            <a:off x="1463040" y="4904232"/>
-            <a:ext cx="9966960" cy="762000"/>
+            <a:off x="1463040" y="4587240"/>
+            <a:ext cx="9966960" cy="682752"/>
           </a:xfrm>
           <a:prstGeom prst="rect">
             <a:avLst/>
@@ -10108,12 +10108,12 @@
         </p:nvSpPr>
         <p:spPr>
           <a:xfrm>
-            <a:off x="548640" y="5775960"/>
-            <a:ext cx="11064240" cy="762000"/>
+            <a:off x="548640" y="5379720"/>
+            <a:ext cx="11064240" cy="682752"/>
           </a:xfrm>
           <a:prstGeom prst="roundRect">
             <a:avLst>
-              <a:gd name="adj" fmla="val 14400"/>
+              <a:gd name="adj" fmla="val 16071"/>
             </a:avLst>
           </a:prstGeom>
           <a:solidFill>
@@ -10139,8 +10139,8 @@
         </p:nvSpPr>
         <p:spPr>
           <a:xfrm>
-            <a:off x="731520" y="5775960"/>
-            <a:ext cx="548640" cy="762000"/>
+            <a:off x="731520" y="5379720"/>
+            <a:ext cx="548640" cy="682752"/>
           </a:xfrm>
           <a:prstGeom prst="rect">
             <a:avLst/>
@@ -10175,8 +10175,8 @@
         </p:nvSpPr>
         <p:spPr>
           <a:xfrm>
-            <a:off x="1463040" y="5775960"/>
-            <a:ext cx="9966960" cy="762000"/>
+            <a:off x="1463040" y="5379720"/>
+            <a:ext cx="9966960" cy="682752"/>
           </a:xfrm>
           <a:prstGeom prst="rect">
             <a:avLst/>
